--- a/index/designs/y8-l14/l2-appliances-inside/l2-appliances-inside.pptx
+++ b/index/designs/y8-l14/l2-appliances-inside/l2-appliances-inside.pptx
@@ -6459,8 +6459,8 @@
         </p:nvSpPr>
         <p:spPr>
           <a:xfrm>
-            <a:off x="507950" y="180975"/>
-            <a:ext cx="1264837" cy="171450"/>
+            <a:off x="507950" y="176213"/>
+            <a:ext cx="1371404" cy="180975"/>
           </a:xfrm>
           <a:prstGeom prst="rect">
             <a:avLst/>
@@ -6498,8 +6498,8 @@
         </p:nvSpPr>
         <p:spPr>
           <a:xfrm>
-            <a:off x="2033439" y="166688"/>
-            <a:ext cx="1109844" cy="200025"/>
+            <a:off x="2137916" y="166688"/>
+            <a:ext cx="1191667" cy="200025"/>
           </a:xfrm>
           <a:prstGeom prst="rect">
             <a:avLst/>
@@ -6537,8 +6537,8 @@
         </p:nvSpPr>
         <p:spPr>
           <a:xfrm>
-            <a:off x="11244709" y="180975"/>
-            <a:ext cx="448127" cy="171450"/>
+            <a:off x="11208097" y="176213"/>
+            <a:ext cx="485471" cy="180975"/>
           </a:xfrm>
           <a:prstGeom prst="rect">
             <a:avLst/>
@@ -8682,7 +8682,7 @@
       </p:sp>
       <p:pic>
         <p:nvPicPr>
-          <p:cNvPr id="10" name="Image 0" descr="/var/folders/6c/210dcgxn4gz5sm71vld2cy1h0000gn/T/tmp.emPkXuZ1Lq/img/shafa.png">    </p:cNvPr>
+          <p:cNvPr id="10" name="Image 0" descr="/var/folders/6c/210dcgxn4gz5sm71vld2cy1h0000gn/T/tmp.owmCEDjpXl/img/shafa.png">    </p:cNvPr>
           <p:cNvPicPr>
             <a:picLocks noChangeAspect="1"/>
           </p:cNvPicPr>
@@ -8781,7 +8781,7 @@
       </p:sp>
       <p:pic>
         <p:nvPicPr>
-          <p:cNvPr id="13" name="Image 1" descr="/var/folders/6c/210dcgxn4gz5sm71vld2cy1h0000gn/T/tmp.emPkXuZ1Lq/img/chaji.png">    </p:cNvPr>
+          <p:cNvPr id="13" name="Image 1" descr="/var/folders/6c/210dcgxn4gz5sm71vld2cy1h0000gn/T/tmp.owmCEDjpXl/img/chaji.png">    </p:cNvPr>
           <p:cNvPicPr>
             <a:picLocks noChangeAspect="1"/>
           </p:cNvPicPr>
@@ -8880,7 +8880,7 @@
       </p:sp>
       <p:pic>
         <p:nvPicPr>
-          <p:cNvPr id="16" name="Image 2" descr="/var/folders/6c/210dcgxn4gz5sm71vld2cy1h0000gn/T/tmp.emPkXuZ1Lq/img/dianshigui.png">    </p:cNvPr>
+          <p:cNvPr id="16" name="Image 2" descr="/var/folders/6c/210dcgxn4gz5sm71vld2cy1h0000gn/T/tmp.owmCEDjpXl/img/dianshigui.png">    </p:cNvPr>
           <p:cNvPicPr>
             <a:picLocks noChangeAspect="1"/>
           </p:cNvPicPr>
@@ -9054,7 +9054,7 @@
       </p:sp>
       <p:pic>
         <p:nvPicPr>
-          <p:cNvPr id="21" name="Image 3" descr="/var/folders/6c/210dcgxn4gz5sm71vld2cy1h0000gn/T/tmp.emPkXuZ1Lq/img/kongtiao.png">    </p:cNvPr>
+          <p:cNvPr id="21" name="Image 3" descr="/var/folders/6c/210dcgxn4gz5sm71vld2cy1h0000gn/T/tmp.owmCEDjpXl/img/kongtiao.png">    </p:cNvPr>
           <p:cNvPicPr>
             <a:picLocks noChangeAspect="1"/>
           </p:cNvPicPr>
@@ -9153,7 +9153,7 @@
       </p:sp>
       <p:pic>
         <p:nvPicPr>
-          <p:cNvPr id="24" name="Image 4" descr="/var/folders/6c/210dcgxn4gz5sm71vld2cy1h0000gn/T/tmp.emPkXuZ1Lq/img/xiyiji.png">    </p:cNvPr>
+          <p:cNvPr id="24" name="Image 4" descr="/var/folders/6c/210dcgxn4gz5sm71vld2cy1h0000gn/T/tmp.owmCEDjpXl/img/xiyiji.png">    </p:cNvPr>
           <p:cNvPicPr>
             <a:picLocks noChangeAspect="1"/>
           </p:cNvPicPr>
@@ -9252,7 +9252,7 @@
       </p:sp>
       <p:pic>
         <p:nvPicPr>
-          <p:cNvPr id="27" name="Image 5" descr="/var/folders/6c/210dcgxn4gz5sm71vld2cy1h0000gn/T/tmp.emPkXuZ1Lq/img/limian.png">    </p:cNvPr>
+          <p:cNvPr id="27" name="Image 5" descr="/var/folders/6c/210dcgxn4gz5sm71vld2cy1h0000gn/T/tmp.owmCEDjpXl/img/limian.png">    </p:cNvPr>
           <p:cNvPicPr>
             <a:picLocks noChangeAspect="1"/>
           </p:cNvPicPr>
@@ -10623,8 +10623,8 @@
         </p:nvSpPr>
         <p:spPr>
           <a:xfrm>
-            <a:off x="507950" y="180975"/>
-            <a:ext cx="1325103" cy="171450"/>
+            <a:off x="507950" y="176213"/>
+            <a:ext cx="1468407" cy="180975"/>
           </a:xfrm>
           <a:prstGeom prst="rect">
             <a:avLst/>
@@ -10662,8 +10662,8 @@
         </p:nvSpPr>
         <p:spPr>
           <a:xfrm>
-            <a:off x="2092523" y="166688"/>
-            <a:ext cx="967451" cy="200025"/>
+            <a:off x="2233017" y="166688"/>
+            <a:ext cx="1046390" cy="200025"/>
           </a:xfrm>
           <a:prstGeom prst="rect">
             <a:avLst/>
@@ -10701,8 +10701,8 @@
         </p:nvSpPr>
         <p:spPr>
           <a:xfrm>
-            <a:off x="11322397" y="180975"/>
-            <a:ext cx="368885" cy="171450"/>
+            <a:off x="11266140" y="176213"/>
+            <a:ext cx="426268" cy="180975"/>
           </a:xfrm>
           <a:prstGeom prst="rect">
             <a:avLst/>
@@ -10770,7 +10770,7 @@
         </p:nvSpPr>
         <p:spPr>
           <a:xfrm>
-            <a:off x="609600" y="2343299"/>
+            <a:off x="609600" y="2357586"/>
             <a:ext cx="11192256" cy="200025"/>
           </a:xfrm>
           <a:prstGeom prst="rect">
@@ -10809,12 +10809,12 @@
         </p:nvSpPr>
         <p:spPr>
           <a:xfrm>
-            <a:off x="609600" y="2670274"/>
-            <a:ext cx="2590800" cy="1488877"/>
+            <a:off x="609600" y="2684562"/>
+            <a:ext cx="2590800" cy="1460302"/>
           </a:xfrm>
           <a:prstGeom prst="roundRect">
             <a:avLst>
-              <a:gd name="adj" fmla="val 7677"/>
+              <a:gd name="adj" fmla="val 7827"/>
             </a:avLst>
           </a:prstGeom>
           <a:solidFill>
@@ -10845,8 +10845,8 @@
         </p:nvSpPr>
         <p:spPr>
           <a:xfrm>
-            <a:off x="722897" y="3009900"/>
-            <a:ext cx="2364206" cy="809625"/>
+            <a:off x="722897" y="3024188"/>
+            <a:ext cx="2364206" cy="781050"/>
           </a:xfrm>
           <a:prstGeom prst="rect">
             <a:avLst/>
@@ -10884,12 +10884,12 @@
         </p:nvSpPr>
         <p:spPr>
           <a:xfrm>
-            <a:off x="3403550" y="2670274"/>
-            <a:ext cx="2590800" cy="1488877"/>
+            <a:off x="3403550" y="2684562"/>
+            <a:ext cx="2590800" cy="1460302"/>
           </a:xfrm>
           <a:prstGeom prst="roundRect">
             <a:avLst>
-              <a:gd name="adj" fmla="val 7677"/>
+              <a:gd name="adj" fmla="val 7827"/>
             </a:avLst>
           </a:prstGeom>
           <a:solidFill>
@@ -10920,8 +10920,8 @@
         </p:nvSpPr>
         <p:spPr>
           <a:xfrm>
-            <a:off x="3516847" y="3009900"/>
-            <a:ext cx="2364206" cy="809625"/>
+            <a:off x="3516847" y="3024188"/>
+            <a:ext cx="2364206" cy="781050"/>
           </a:xfrm>
           <a:prstGeom prst="rect">
             <a:avLst/>
@@ -10959,12 +10959,12 @@
         </p:nvSpPr>
         <p:spPr>
           <a:xfrm>
-            <a:off x="6197501" y="2670274"/>
-            <a:ext cx="2590800" cy="1488877"/>
+            <a:off x="6197501" y="2684562"/>
+            <a:ext cx="2590800" cy="1460302"/>
           </a:xfrm>
           <a:prstGeom prst="roundRect">
             <a:avLst>
-              <a:gd name="adj" fmla="val 7677"/>
+              <a:gd name="adj" fmla="val 7827"/>
             </a:avLst>
           </a:prstGeom>
           <a:solidFill>
@@ -10995,8 +10995,8 @@
         </p:nvSpPr>
         <p:spPr>
           <a:xfrm>
-            <a:off x="6310798" y="3009900"/>
-            <a:ext cx="2364206" cy="809625"/>
+            <a:off x="6310798" y="3024188"/>
+            <a:ext cx="2364206" cy="781050"/>
           </a:xfrm>
           <a:prstGeom prst="rect">
             <a:avLst/>
@@ -11034,12 +11034,12 @@
         </p:nvSpPr>
         <p:spPr>
           <a:xfrm>
-            <a:off x="8991451" y="2670274"/>
-            <a:ext cx="2590949" cy="1488877"/>
+            <a:off x="8991451" y="2684562"/>
+            <a:ext cx="2590949" cy="1460302"/>
           </a:xfrm>
           <a:prstGeom prst="roundRect">
             <a:avLst>
-              <a:gd name="adj" fmla="val 7677"/>
+              <a:gd name="adj" fmla="val 7827"/>
             </a:avLst>
           </a:prstGeom>
           <a:solidFill>
@@ -11070,8 +11070,8 @@
         </p:nvSpPr>
         <p:spPr>
           <a:xfrm>
-            <a:off x="9104747" y="3009900"/>
-            <a:ext cx="2364358" cy="809625"/>
+            <a:off x="9104747" y="3024188"/>
+            <a:ext cx="2364358" cy="781050"/>
           </a:xfrm>
           <a:prstGeom prst="rect">
             <a:avLst/>
@@ -11109,7 +11109,7 @@
         </p:nvSpPr>
         <p:spPr>
           <a:xfrm>
-            <a:off x="609600" y="4311551"/>
+            <a:off x="609600" y="4297263"/>
             <a:ext cx="11192256" cy="228600"/>
           </a:xfrm>
           <a:prstGeom prst="rect">
@@ -14106,8 +14106,8 @@
         </p:nvSpPr>
         <p:spPr>
           <a:xfrm>
-            <a:off x="507950" y="176213"/>
-            <a:ext cx="2644893" cy="180975"/>
+            <a:off x="507950" y="180975"/>
+            <a:ext cx="2386370" cy="171450"/>
           </a:xfrm>
           <a:prstGeom prst="rect">
             <a:avLst/>
@@ -14145,8 +14145,8 @@
         </p:nvSpPr>
         <p:spPr>
           <a:xfrm>
-            <a:off x="3386435" y="166688"/>
-            <a:ext cx="1504840" cy="200025"/>
+            <a:off x="3132981" y="166688"/>
+            <a:ext cx="1341194" cy="200025"/>
           </a:xfrm>
           <a:prstGeom prst="rect">
             <a:avLst/>
@@ -14184,8 +14184,8 @@
         </p:nvSpPr>
         <p:spPr>
           <a:xfrm>
-            <a:off x="11183541" y="176213"/>
-            <a:ext cx="510519" cy="180975"/>
+            <a:off x="11244709" y="180975"/>
+            <a:ext cx="448127" cy="171450"/>
           </a:xfrm>
           <a:prstGeom prst="rect">
             <a:avLst/>
@@ -14253,7 +14253,7 @@
         </p:nvSpPr>
         <p:spPr>
           <a:xfrm>
-            <a:off x="609600" y="1083915"/>
+            <a:off x="609600" y="1064865"/>
             <a:ext cx="11192256" cy="200025"/>
           </a:xfrm>
           <a:prstGeom prst="rect">
@@ -14292,12 +14292,12 @@
         </p:nvSpPr>
         <p:spPr>
           <a:xfrm>
-            <a:off x="609600" y="1283940"/>
-            <a:ext cx="10972800" cy="925711"/>
+            <a:off x="609600" y="1264890"/>
+            <a:ext cx="10972800" cy="935236"/>
           </a:xfrm>
           <a:prstGeom prst="roundRect">
             <a:avLst>
-              <a:gd name="adj" fmla="val 6860"/>
+              <a:gd name="adj" fmla="val 6790"/>
             </a:avLst>
           </a:prstGeom>
           <a:solidFill>
@@ -14328,7 +14328,7 @@
         </p:nvSpPr>
         <p:spPr>
           <a:xfrm>
-            <a:off x="822275" y="1445865"/>
+            <a:off x="822275" y="1426815"/>
             <a:ext cx="297841" cy="350490"/>
           </a:xfrm>
           <a:prstGeom prst="rect">
@@ -14370,8 +14370,8 @@
         </p:nvSpPr>
         <p:spPr>
           <a:xfrm>
-            <a:off x="1279327" y="1445865"/>
-            <a:ext cx="3786161" cy="284411"/>
+            <a:off x="1279327" y="1426815"/>
+            <a:ext cx="3730297" cy="284411"/>
           </a:xfrm>
           <a:prstGeom prst="rect">
             <a:avLst/>
@@ -14412,8 +14412,8 @@
         </p:nvSpPr>
         <p:spPr>
           <a:xfrm>
-            <a:off x="1279327" y="1781026"/>
-            <a:ext cx="3786161" cy="266700"/>
+            <a:off x="1279327" y="1761976"/>
+            <a:ext cx="3730297" cy="276225"/>
           </a:xfrm>
           <a:prstGeom prst="rect">
             <a:avLst/>
@@ -14454,12 +14454,12 @@
         </p:nvSpPr>
         <p:spPr>
           <a:xfrm>
-            <a:off x="609600" y="2362051"/>
-            <a:ext cx="10972800" cy="925711"/>
+            <a:off x="609600" y="2352526"/>
+            <a:ext cx="10972800" cy="935236"/>
           </a:xfrm>
           <a:prstGeom prst="roundRect">
             <a:avLst>
-              <a:gd name="adj" fmla="val 6860"/>
+              <a:gd name="adj" fmla="val 6790"/>
             </a:avLst>
           </a:prstGeom>
           <a:solidFill>
@@ -14490,7 +14490,7 @@
         </p:nvSpPr>
         <p:spPr>
           <a:xfrm>
-            <a:off x="822275" y="2523976"/>
+            <a:off x="822275" y="2514451"/>
             <a:ext cx="297841" cy="350490"/>
           </a:xfrm>
           <a:prstGeom prst="rect">
@@ -14532,8 +14532,8 @@
         </p:nvSpPr>
         <p:spPr>
           <a:xfrm>
-            <a:off x="1279327" y="2523976"/>
-            <a:ext cx="4627614" cy="284411"/>
+            <a:off x="1279327" y="2514451"/>
+            <a:ext cx="4559150" cy="284411"/>
           </a:xfrm>
           <a:prstGeom prst="rect">
             <a:avLst/>
@@ -14574,8 +14574,8 @@
         </p:nvSpPr>
         <p:spPr>
           <a:xfrm>
-            <a:off x="1279327" y="2859137"/>
-            <a:ext cx="4627614" cy="266700"/>
+            <a:off x="1279327" y="2849612"/>
+            <a:ext cx="4559150" cy="276225"/>
           </a:xfrm>
           <a:prstGeom prst="rect">
             <a:avLst/>
@@ -14617,11 +14617,11 @@
         <p:spPr>
           <a:xfrm>
             <a:off x="609600" y="3440162"/>
-            <a:ext cx="10972800" cy="925711"/>
+            <a:ext cx="10972800" cy="935236"/>
           </a:xfrm>
           <a:prstGeom prst="roundRect">
             <a:avLst>
-              <a:gd name="adj" fmla="val 6860"/>
+              <a:gd name="adj" fmla="val 6790"/>
             </a:avLst>
           </a:prstGeom>
           <a:solidFill>
@@ -14737,7 +14737,7 @@
         <p:spPr>
           <a:xfrm>
             <a:off x="1279327" y="3937248"/>
-            <a:ext cx="2914650" cy="266700"/>
+            <a:ext cx="2914650" cy="276225"/>
           </a:xfrm>
           <a:prstGeom prst="rect">
             <a:avLst/>
@@ -14778,12 +14778,12 @@
         </p:nvSpPr>
         <p:spPr>
           <a:xfrm>
-            <a:off x="609600" y="4518273"/>
-            <a:ext cx="10972800" cy="925711"/>
+            <a:off x="609600" y="4527798"/>
+            <a:ext cx="10972800" cy="935236"/>
           </a:xfrm>
           <a:prstGeom prst="roundRect">
             <a:avLst>
-              <a:gd name="adj" fmla="val 6860"/>
+              <a:gd name="adj" fmla="val 6790"/>
             </a:avLst>
           </a:prstGeom>
           <a:solidFill>
@@ -14814,7 +14814,7 @@
         </p:nvSpPr>
         <p:spPr>
           <a:xfrm>
-            <a:off x="822275" y="4680198"/>
+            <a:off x="822275" y="4689723"/>
             <a:ext cx="297841" cy="350490"/>
           </a:xfrm>
           <a:prstGeom prst="rect">
@@ -14856,8 +14856,8 @@
         </p:nvSpPr>
         <p:spPr>
           <a:xfrm>
-            <a:off x="1279327" y="4680198"/>
-            <a:ext cx="6731020" cy="284411"/>
+            <a:off x="1279327" y="4689723"/>
+            <a:ext cx="6631588" cy="284411"/>
           </a:xfrm>
           <a:prstGeom prst="rect">
             <a:avLst/>
@@ -14931,8 +14931,8 @@
         </p:nvSpPr>
         <p:spPr>
           <a:xfrm>
-            <a:off x="1279327" y="5015359"/>
-            <a:ext cx="6731020" cy="266700"/>
+            <a:off x="1279327" y="5024884"/>
+            <a:ext cx="6631588" cy="276225"/>
           </a:xfrm>
           <a:prstGeom prst="rect">
             <a:avLst/>
@@ -14973,7 +14973,7 @@
         </p:nvSpPr>
         <p:spPr>
           <a:xfrm>
-            <a:off x="609600" y="5570934"/>
+            <a:off x="609600" y="5589984"/>
             <a:ext cx="11192256" cy="228600"/>
           </a:xfrm>
           <a:prstGeom prst="rect">
@@ -17452,7 +17452,7 @@
       </p:sp>
       <p:pic>
         <p:nvPicPr>
-          <p:cNvPr id="10" name="Image 0" descr="/var/folders/6c/210dcgxn4gz5sm71vld2cy1h0000gn/T/tmp.emPkXuZ1Lq/img/kongtiao.png">    </p:cNvPr>
+          <p:cNvPr id="10" name="Image 0" descr="/var/folders/6c/210dcgxn4gz5sm71vld2cy1h0000gn/T/tmp.owmCEDjpXl/img/kongtiao.png">    </p:cNvPr>
           <p:cNvPicPr>
             <a:picLocks noChangeAspect="1"/>
           </p:cNvPicPr>
@@ -17632,7 +17632,7 @@
       </p:sp>
       <p:pic>
         <p:nvPicPr>
-          <p:cNvPr id="15" name="Image 1" descr="/var/folders/6c/210dcgxn4gz5sm71vld2cy1h0000gn/T/tmp.emPkXuZ1Lq/img/xiyiji.png">    </p:cNvPr>
+          <p:cNvPr id="15" name="Image 1" descr="/var/folders/6c/210dcgxn4gz5sm71vld2cy1h0000gn/T/tmp.owmCEDjpXl/img/xiyiji.png">    </p:cNvPr>
           <p:cNvPicPr>
             <a:picLocks noChangeAspect="1"/>
           </p:cNvPicPr>
@@ -18047,7 +18047,7 @@
       </p:sp>
       <p:pic>
         <p:nvPicPr>
-          <p:cNvPr id="9" name="Image 0" descr="/var/folders/6c/210dcgxn4gz5sm71vld2cy1h0000gn/T/tmp.emPkXuZ1Lq/img/kongtiao.png">    </p:cNvPr>
+          <p:cNvPr id="9" name="Image 0" descr="/var/folders/6c/210dcgxn4gz5sm71vld2cy1h0000gn/T/tmp.owmCEDjpXl/img/kongtiao.png">    </p:cNvPr>
           <p:cNvPicPr>
             <a:picLocks noChangeAspect="1"/>
           </p:cNvPicPr>
@@ -19934,7 +19934,7 @@
       </p:sp>
       <p:pic>
         <p:nvPicPr>
-          <p:cNvPr id="10" name="Image 0" descr="/var/folders/6c/210dcgxn4gz5sm71vld2cy1h0000gn/T/tmp.emPkXuZ1Lq/img/limian.png">    </p:cNvPr>
+          <p:cNvPr id="10" name="Image 0" descr="/var/folders/6c/210dcgxn4gz5sm71vld2cy1h0000gn/T/tmp.owmCEDjpXl/img/limian.png">    </p:cNvPr>
           <p:cNvPicPr>
             <a:picLocks noChangeAspect="1"/>
           </p:cNvPicPr>
